--- a/example4-prenormalized-nodummy/results/report.pptx
+++ b/example4-prenormalized-nodummy/results/report.pptx
@@ -10,7 +10,7 @@
   <p:handoutMasterIdLst>
     <p:handoutMasterId r:id="rId3"/>
   </p:handoutMasterIdLst>
-  <p:sldIdLst>
+  <p:sldIdLst xmlns:a="http://schemas.openxmlformats.org/drawingml/2006/main" xmlns:r="http://schemas.openxmlformats.org/officeDocument/2006/relationships" xmlns:p="http://schemas.openxmlformats.org/presentationml/2006/main">
     <p:sldId id="256" r:id="rId8"/>
     <p:sldId id="257" r:id="rId9"/>
     <p:sldId id="258" r:id="rId10"/>
@@ -19,6 +19,10 @@
     <p:sldId id="261" r:id="rId13"/>
     <p:sldId id="262" r:id="rId14"/>
     <p:sldId id="263" r:id="rId15"/>
+    <p:sldId id="264" r:id="rId16"/>
+    <p:sldId id="265" r:id="rId17"/>
+    <p:sldId id="266" r:id="rId18"/>
+    <p:sldId id="267" r:id="rId19"/>
   </p:sldIdLst>
   <p:sldSz cx="9144000" cy="6858000" type="screen4x3"/>
   <p:notesSz cx="6858000" cy="9144000"/>
@@ -1789,7 +1793,7 @@
           <a:chExt cx="0" cy="0"/>
         </a:xfrm>
       </p:grpSpPr>
-      <p:sp>
+      <p:sp xmlns:a="http://schemas.openxmlformats.org/drawingml/2006/main" xmlns:r="http://schemas.openxmlformats.org/officeDocument/2006/relationships" xmlns:p="http://schemas.openxmlformats.org/presentationml/2006/main">
         <p:nvSpPr>
           <p:cNvPr id="2" name="Title 1"/>
           <p:cNvSpPr>
@@ -1816,7 +1820,7 @@
           </a:p>
         </p:txBody>
       </p:sp>
-      <p:sp>
+      <p:sp xmlns:a="http://schemas.openxmlformats.org/drawingml/2006/main" xmlns:r="http://schemas.openxmlformats.org/officeDocument/2006/relationships" xmlns:p="http://schemas.openxmlformats.org/presentationml/2006/main">
         <p:nvSpPr>
           <p:cNvPr id="3" name="Subtitle 2"/>
           <p:cNvSpPr>
@@ -1843,6 +1847,454 @@
           </a:p>
         </p:txBody>
       </p:sp>
+    </p:spTree>
+  </p:cSld>
+  <p:clrMapOvr>
+    <a:masterClrMapping/>
+  </p:clrMapOvr>
+</p:sld>
+</file>
+
+<file path=ppt/slides/slide10.xml><?xml version="1.0" encoding="utf-8"?>
+<p:sld xmlns:a="http://schemas.openxmlformats.org/drawingml/2006/main" xmlns:r="http://schemas.openxmlformats.org/officeDocument/2006/relationships" xmlns:p="http://schemas.openxmlformats.org/presentationml/2006/main">
+  <p:cSld>
+    <p:spTree>
+      <p:nvGrpSpPr>
+        <p:cNvPr id="1" name=""/>
+        <p:cNvGrpSpPr/>
+        <p:nvPr/>
+      </p:nvGrpSpPr>
+      <p:grpSpPr>
+        <a:xfrm>
+          <a:off x="0" y="0"/>
+          <a:ext cx="0" cy="0"/>
+          <a:chOff x="0" y="0"/>
+          <a:chExt cx="0" cy="0"/>
+        </a:xfrm>
+      </p:grpSpPr>
+      <p:sp xmlns:a="http://schemas.openxmlformats.org/drawingml/2006/main" xmlns:r="http://schemas.openxmlformats.org/officeDocument/2006/relationships" xmlns:p="http://schemas.openxmlformats.org/presentationml/2006/main">
+        <p:nvSpPr>
+          <p:cNvPr id="2" name="Title 1"/>
+          <p:cNvSpPr>
+            <a:spLocks noGrp="1"/>
+          </p:cNvSpPr>
+          <p:nvPr>
+            <p:ph type="title"/>
+          </p:nvPr>
+        </p:nvSpPr>
+        <p:spPr>
+          <a:xfrm>
+            <a:off x="457200" y="6283"/>
+            <a:ext cx="8229600" cy="659640"/>
+          </a:xfrm>
+        </p:spPr>
+        <p:txBody>
+          <a:bodyPr/>
+          <a:lstStyle/>
+          <a:p>
+            <a:r>
+              <a:rPr/>
+              <a:t>Comparison MaleMHFD_over_MaleMRD</a:t>
+            </a:r>
+          </a:p>
+        </p:txBody>
+      </p:sp>
+      <p:sp xmlns:a="http://schemas.openxmlformats.org/drawingml/2006/main" xmlns:r="http://schemas.openxmlformats.org/officeDocument/2006/relationships" xmlns:p="http://schemas.openxmlformats.org/presentationml/2006/main">
+        <p:nvSpPr>
+          <p:cNvPr id="3" name="Text Placeholder 4"/>
+          <p:cNvSpPr>
+            <a:spLocks noGrp="1"/>
+          </p:cNvSpPr>
+          <p:nvPr>
+            <p:ph type="body" sz="quarter" idx="3"/>
+          </p:nvPr>
+        </p:nvSpPr>
+        <p:spPr>
+          <a:xfrm>
+            <a:off x="4645025" y="782905"/>
+            <a:ext cx="4041775" cy="639762"/>
+          </a:xfrm>
+        </p:spPr>
+        <p:txBody>
+          <a:bodyPr/>
+          <a:lstStyle/>
+          <a:p>
+            <a:r>
+              <a:rPr/>
+              <a:t>Differential FDR&lt;0.25</a:t>
+            </a:r>
+          </a:p>
+        </p:txBody>
+      </p:sp>
+      <p:sp xmlns:a="http://schemas.openxmlformats.org/drawingml/2006/main" xmlns:r="http://schemas.openxmlformats.org/officeDocument/2006/relationships" xmlns:p="http://schemas.openxmlformats.org/presentationml/2006/main">
+        <p:nvSpPr>
+          <p:cNvPr id="4" name="Text Placeholder 2"/>
+          <p:cNvSpPr>
+            <a:spLocks noGrp="1"/>
+          </p:cNvSpPr>
+          <p:nvPr>
+            <p:ph type="body" idx="1"/>
+          </p:nvPr>
+        </p:nvSpPr>
+        <p:spPr>
+          <a:xfrm>
+            <a:off x="457200" y="776118"/>
+            <a:ext cx="4040188" cy="639762"/>
+          </a:xfrm>
+        </p:spPr>
+        <p:txBody>
+          <a:bodyPr/>
+          <a:lstStyle/>
+          <a:p>
+            <a:r>
+              <a:rPr/>
+              <a:t>Complete Set FDR=1</a:t>
+            </a:r>
+          </a:p>
+        </p:txBody>
+      </p:sp>
+      <p:pic xmlns:a="http://schemas.openxmlformats.org/drawingml/2006/main" xmlns:r="http://schemas.openxmlformats.org/officeDocument/2006/relationships" xmlns:p="http://schemas.openxmlformats.org/presentationml/2006/main">
+        <p:nvPicPr>
+          <p:cNvPr id="5" name="" descr=""/>
+          <p:cNvPicPr>
+            <a:picLocks noGrp="1"/>
+          </p:cNvPicPr>
+          <p:nvPr>
+            <p:ph/>
+          </p:nvPr>
+        </p:nvPicPr>
+        <p:blipFill>
+          <a:blip cstate="print" r:embed="rId2"/>
+          <a:stretch>
+            <a:fillRect/>
+          </a:stretch>
+        </p:blipFill>
+        <p:spPr>
+          <a:xfrm>
+            <a:off x="4645152" y="1426464"/>
+            <a:ext cx="4114800" cy="5440680"/>
+          </a:xfrm>
+          <a:prstGeom prst="rect">
+            <a:avLst/>
+          </a:prstGeom>
+        </p:spPr>
+      </p:pic>
+      <p:pic xmlns:a="http://schemas.openxmlformats.org/drawingml/2006/main" xmlns:r="http://schemas.openxmlformats.org/officeDocument/2006/relationships" xmlns:p="http://schemas.openxmlformats.org/presentationml/2006/main">
+        <p:nvPicPr>
+          <p:cNvPr id="6" name="" descr=""/>
+          <p:cNvPicPr>
+            <a:picLocks noGrp="1"/>
+          </p:cNvPicPr>
+          <p:nvPr>
+            <p:ph/>
+          </p:nvPr>
+        </p:nvPicPr>
+        <p:blipFill>
+          <a:blip cstate="print" r:embed="rId3"/>
+          <a:stretch>
+            <a:fillRect/>
+          </a:stretch>
+        </p:blipFill>
+        <p:spPr>
+          <a:xfrm>
+            <a:off x="457200" y="1426464"/>
+            <a:ext cx="4114800" cy="5440680"/>
+          </a:xfrm>
+          <a:prstGeom prst="rect">
+            <a:avLst/>
+          </a:prstGeom>
+        </p:spPr>
+      </p:pic>
+    </p:spTree>
+  </p:cSld>
+  <p:clrMapOvr>
+    <a:masterClrMapping/>
+  </p:clrMapOvr>
+</p:sld>
+</file>
+
+<file path=ppt/slides/slide11.xml><?xml version="1.0" encoding="utf-8"?>
+<p:sld xmlns:a="http://schemas.openxmlformats.org/drawingml/2006/main" xmlns:r="http://schemas.openxmlformats.org/officeDocument/2006/relationships" xmlns:p="http://schemas.openxmlformats.org/presentationml/2006/main">
+  <p:cSld>
+    <p:spTree>
+      <p:nvGrpSpPr>
+        <p:cNvPr id="1" name=""/>
+        <p:cNvGrpSpPr/>
+        <p:nvPr/>
+      </p:nvGrpSpPr>
+      <p:grpSpPr>
+        <a:xfrm>
+          <a:off x="0" y="0"/>
+          <a:ext cx="0" cy="0"/>
+          <a:chOff x="0" y="0"/>
+          <a:chExt cx="0" cy="0"/>
+        </a:xfrm>
+      </p:grpSpPr>
+      <p:sp xmlns:a="http://schemas.openxmlformats.org/drawingml/2006/main" xmlns:r="http://schemas.openxmlformats.org/officeDocument/2006/relationships" xmlns:p="http://schemas.openxmlformats.org/presentationml/2006/main">
+        <p:nvSpPr>
+          <p:cNvPr id="2" name="Title 1"/>
+          <p:cNvSpPr>
+            <a:spLocks noGrp="1"/>
+          </p:cNvSpPr>
+          <p:nvPr>
+            <p:ph type="title"/>
+          </p:nvPr>
+        </p:nvSpPr>
+        <p:spPr>
+          <a:xfrm>
+            <a:off x="457200" y="6283"/>
+            <a:ext cx="8229600" cy="659640"/>
+          </a:xfrm>
+        </p:spPr>
+        <p:txBody>
+          <a:bodyPr/>
+          <a:lstStyle/>
+          <a:p>
+            <a:r>
+              <a:rPr/>
+              <a:t>Comparison FemMHFD_over_FemMRD</a:t>
+            </a:r>
+          </a:p>
+        </p:txBody>
+      </p:sp>
+      <p:sp xmlns:a="http://schemas.openxmlformats.org/drawingml/2006/main" xmlns:r="http://schemas.openxmlformats.org/officeDocument/2006/relationships" xmlns:p="http://schemas.openxmlformats.org/presentationml/2006/main">
+        <p:nvSpPr>
+          <p:cNvPr id="3" name="Text Placeholder 4"/>
+          <p:cNvSpPr>
+            <a:spLocks noGrp="1"/>
+          </p:cNvSpPr>
+          <p:nvPr>
+            <p:ph type="body" sz="quarter" idx="3"/>
+          </p:nvPr>
+        </p:nvSpPr>
+        <p:spPr>
+          <a:xfrm>
+            <a:off x="4645025" y="782905"/>
+            <a:ext cx="4041775" cy="639762"/>
+          </a:xfrm>
+        </p:spPr>
+        <p:txBody>
+          <a:bodyPr/>
+          <a:lstStyle/>
+          <a:p>
+            <a:r>
+              <a:rPr/>
+              <a:t>Differential FDR&lt;0.25</a:t>
+            </a:r>
+          </a:p>
+        </p:txBody>
+      </p:sp>
+      <p:sp xmlns:a="http://schemas.openxmlformats.org/drawingml/2006/main" xmlns:r="http://schemas.openxmlformats.org/officeDocument/2006/relationships" xmlns:p="http://schemas.openxmlformats.org/presentationml/2006/main">
+        <p:nvSpPr>
+          <p:cNvPr id="4" name="Text Placeholder 2"/>
+          <p:cNvSpPr>
+            <a:spLocks noGrp="1"/>
+          </p:cNvSpPr>
+          <p:nvPr>
+            <p:ph type="body" idx="1"/>
+          </p:nvPr>
+        </p:nvSpPr>
+        <p:spPr>
+          <a:xfrm>
+            <a:off x="457200" y="776118"/>
+            <a:ext cx="4040188" cy="639762"/>
+          </a:xfrm>
+        </p:spPr>
+        <p:txBody>
+          <a:bodyPr/>
+          <a:lstStyle/>
+          <a:p>
+            <a:r>
+              <a:rPr/>
+              <a:t>Complete Set FDR=1</a:t>
+            </a:r>
+          </a:p>
+        </p:txBody>
+      </p:sp>
+      <p:pic xmlns:a="http://schemas.openxmlformats.org/drawingml/2006/main" xmlns:r="http://schemas.openxmlformats.org/officeDocument/2006/relationships" xmlns:p="http://schemas.openxmlformats.org/presentationml/2006/main">
+        <p:nvPicPr>
+          <p:cNvPr id="5" name="" descr=""/>
+          <p:cNvPicPr>
+            <a:picLocks noGrp="1"/>
+          </p:cNvPicPr>
+          <p:nvPr>
+            <p:ph/>
+          </p:nvPr>
+        </p:nvPicPr>
+        <p:blipFill>
+          <a:blip cstate="print" r:embed="rId2"/>
+          <a:stretch>
+            <a:fillRect/>
+          </a:stretch>
+        </p:blipFill>
+        <p:spPr>
+          <a:xfrm>
+            <a:off x="457200" y="1426464"/>
+            <a:ext cx="4114800" cy="5440680"/>
+          </a:xfrm>
+          <a:prstGeom prst="rect">
+            <a:avLst/>
+          </a:prstGeom>
+        </p:spPr>
+      </p:pic>
+    </p:spTree>
+  </p:cSld>
+  <p:clrMapOvr>
+    <a:masterClrMapping/>
+  </p:clrMapOvr>
+</p:sld>
+</file>
+
+<file path=ppt/slides/slide12.xml><?xml version="1.0" encoding="utf-8"?>
+<p:sld xmlns:a="http://schemas.openxmlformats.org/drawingml/2006/main" xmlns:r="http://schemas.openxmlformats.org/officeDocument/2006/relationships" xmlns:p="http://schemas.openxmlformats.org/presentationml/2006/main">
+  <p:cSld>
+    <p:spTree>
+      <p:nvGrpSpPr>
+        <p:cNvPr id="1" name=""/>
+        <p:cNvGrpSpPr/>
+        <p:nvPr/>
+      </p:nvGrpSpPr>
+      <p:grpSpPr>
+        <a:xfrm>
+          <a:off x="0" y="0"/>
+          <a:ext cx="0" cy="0"/>
+          <a:chOff x="0" y="0"/>
+          <a:chExt cx="0" cy="0"/>
+        </a:xfrm>
+      </p:grpSpPr>
+      <p:sp xmlns:a="http://schemas.openxmlformats.org/drawingml/2006/main" xmlns:r="http://schemas.openxmlformats.org/officeDocument/2006/relationships" xmlns:p="http://schemas.openxmlformats.org/presentationml/2006/main">
+        <p:nvSpPr>
+          <p:cNvPr id="2" name="Title 1"/>
+          <p:cNvSpPr>
+            <a:spLocks noGrp="1"/>
+          </p:cNvSpPr>
+          <p:nvPr>
+            <p:ph type="title"/>
+          </p:nvPr>
+        </p:nvSpPr>
+        <p:spPr>
+          <a:xfrm>
+            <a:off x="457200" y="6283"/>
+            <a:ext cx="8229600" cy="659640"/>
+          </a:xfrm>
+        </p:spPr>
+        <p:txBody>
+          <a:bodyPr/>
+          <a:lstStyle/>
+          <a:p>
+            <a:r>
+              <a:rPr/>
+              <a:t>Comparison MaleMRD_MaleMHFD_FemMRD_FemMHFD</a:t>
+            </a:r>
+          </a:p>
+        </p:txBody>
+      </p:sp>
+      <p:sp xmlns:a="http://schemas.openxmlformats.org/drawingml/2006/main" xmlns:r="http://schemas.openxmlformats.org/officeDocument/2006/relationships" xmlns:p="http://schemas.openxmlformats.org/presentationml/2006/main">
+        <p:nvSpPr>
+          <p:cNvPr id="3" name="Text Placeholder 4"/>
+          <p:cNvSpPr>
+            <a:spLocks noGrp="1"/>
+          </p:cNvSpPr>
+          <p:nvPr>
+            <p:ph type="body" sz="quarter" idx="3"/>
+          </p:nvPr>
+        </p:nvSpPr>
+        <p:spPr>
+          <a:xfrm>
+            <a:off x="4645025" y="782905"/>
+            <a:ext cx="4041775" cy="639762"/>
+          </a:xfrm>
+        </p:spPr>
+        <p:txBody>
+          <a:bodyPr/>
+          <a:lstStyle/>
+          <a:p>
+            <a:r>
+              <a:rPr/>
+              <a:t>Differential FDR&lt;0.25</a:t>
+            </a:r>
+          </a:p>
+        </p:txBody>
+      </p:sp>
+      <p:sp xmlns:a="http://schemas.openxmlformats.org/drawingml/2006/main" xmlns:r="http://schemas.openxmlformats.org/officeDocument/2006/relationships" xmlns:p="http://schemas.openxmlformats.org/presentationml/2006/main">
+        <p:nvSpPr>
+          <p:cNvPr id="4" name="Text Placeholder 2"/>
+          <p:cNvSpPr>
+            <a:spLocks noGrp="1"/>
+          </p:cNvSpPr>
+          <p:nvPr>
+            <p:ph type="body" idx="1"/>
+          </p:nvPr>
+        </p:nvSpPr>
+        <p:spPr>
+          <a:xfrm>
+            <a:off x="457200" y="776118"/>
+            <a:ext cx="4040188" cy="639762"/>
+          </a:xfrm>
+        </p:spPr>
+        <p:txBody>
+          <a:bodyPr/>
+          <a:lstStyle/>
+          <a:p>
+            <a:r>
+              <a:rPr/>
+              <a:t>Complete Set FDR=1</a:t>
+            </a:r>
+          </a:p>
+        </p:txBody>
+      </p:sp>
+      <p:pic xmlns:a="http://schemas.openxmlformats.org/drawingml/2006/main" xmlns:r="http://schemas.openxmlformats.org/officeDocument/2006/relationships" xmlns:p="http://schemas.openxmlformats.org/presentationml/2006/main">
+        <p:nvPicPr>
+          <p:cNvPr id="5" name="" descr=""/>
+          <p:cNvPicPr>
+            <a:picLocks noGrp="1"/>
+          </p:cNvPicPr>
+          <p:nvPr>
+            <p:ph/>
+          </p:nvPr>
+        </p:nvPicPr>
+        <p:blipFill>
+          <a:blip cstate="print" r:embed="rId2"/>
+          <a:stretch>
+            <a:fillRect/>
+          </a:stretch>
+        </p:blipFill>
+        <p:spPr>
+          <a:xfrm>
+            <a:off x="4645152" y="1426464"/>
+            <a:ext cx="4114800" cy="5440680"/>
+          </a:xfrm>
+          <a:prstGeom prst="rect">
+            <a:avLst/>
+          </a:prstGeom>
+        </p:spPr>
+      </p:pic>
+      <p:pic xmlns:a="http://schemas.openxmlformats.org/drawingml/2006/main" xmlns:r="http://schemas.openxmlformats.org/officeDocument/2006/relationships" xmlns:p="http://schemas.openxmlformats.org/presentationml/2006/main">
+        <p:nvPicPr>
+          <p:cNvPr id="6" name="" descr=""/>
+          <p:cNvPicPr>
+            <a:picLocks noGrp="1"/>
+          </p:cNvPicPr>
+          <p:nvPr>
+            <p:ph/>
+          </p:nvPr>
+        </p:nvPicPr>
+        <p:blipFill>
+          <a:blip cstate="print" r:embed="rId3"/>
+          <a:stretch>
+            <a:fillRect/>
+          </a:stretch>
+        </p:blipFill>
+        <p:spPr>
+          <a:xfrm>
+            <a:off x="457200" y="1426464"/>
+            <a:ext cx="4114800" cy="5440680"/>
+          </a:xfrm>
+          <a:prstGeom prst="rect">
+            <a:avLst/>
+          </a:prstGeom>
+        </p:spPr>
+      </p:pic>
     </p:spTree>
   </p:cSld>
   <p:clrMapOvr>
@@ -1868,7 +2320,7 @@
           <a:chExt cx="0" cy="0"/>
         </a:xfrm>
       </p:grpSpPr>
-      <p:sp>
+      <p:sp xmlns:a="http://schemas.openxmlformats.org/drawingml/2006/main" xmlns:r="http://schemas.openxmlformats.org/officeDocument/2006/relationships" xmlns:p="http://schemas.openxmlformats.org/presentationml/2006/main">
         <p:nvSpPr>
           <p:cNvPr id="2" name="Title 1"/>
           <p:cNvSpPr>
@@ -1895,7 +2347,7 @@
           </a:p>
         </p:txBody>
       </p:sp>
-      <p:sp>
+      <p:sp xmlns:a="http://schemas.openxmlformats.org/drawingml/2006/main" xmlns:r="http://schemas.openxmlformats.org/officeDocument/2006/relationships" xmlns:p="http://schemas.openxmlformats.org/presentationml/2006/main">
         <p:nvSpPr>
           <p:cNvPr id="3" name="Content Placeholder 2"/>
           <p:cNvSpPr>
@@ -2018,7 +2470,7 @@
           <a:chExt cx="0" cy="0"/>
         </a:xfrm>
       </p:grpSpPr>
-      <p:sp>
+      <p:sp xmlns:a="http://schemas.openxmlformats.org/drawingml/2006/main" xmlns:r="http://schemas.openxmlformats.org/officeDocument/2006/relationships" xmlns:p="http://schemas.openxmlformats.org/presentationml/2006/main">
         <p:nvSpPr>
           <p:cNvPr id="2" name="Title 1"/>
           <p:cNvSpPr>
@@ -2045,7 +2497,7 @@
           </a:p>
         </p:txBody>
       </p:sp>
-      <p:pic>
+      <p:pic xmlns:a="http://schemas.openxmlformats.org/drawingml/2006/main" xmlns:r="http://schemas.openxmlformats.org/officeDocument/2006/relationships" xmlns:p="http://schemas.openxmlformats.org/presentationml/2006/main">
         <p:nvPicPr>
           <p:cNvPr id="3" name="" descr=""/>
           <p:cNvPicPr>
@@ -2096,7 +2548,7 @@
           <a:chExt cx="0" cy="0"/>
         </a:xfrm>
       </p:grpSpPr>
-      <p:sp>
+      <p:sp xmlns:a="http://schemas.openxmlformats.org/drawingml/2006/main" xmlns:r="http://schemas.openxmlformats.org/officeDocument/2006/relationships" xmlns:p="http://schemas.openxmlformats.org/presentationml/2006/main">
         <p:nvSpPr>
           <p:cNvPr id="2" name="Title 1"/>
           <p:cNvSpPr>
@@ -2123,7 +2575,7 @@
           </a:p>
         </p:txBody>
       </p:sp>
-      <p:pic>
+      <p:pic xmlns:a="http://schemas.openxmlformats.org/drawingml/2006/main" xmlns:r="http://schemas.openxmlformats.org/officeDocument/2006/relationships" xmlns:p="http://schemas.openxmlformats.org/presentationml/2006/main">
         <p:nvPicPr>
           <p:cNvPr id="3" name="" descr=""/>
           <p:cNvPicPr>
@@ -2174,7 +2626,7 @@
           <a:chExt cx="0" cy="0"/>
         </a:xfrm>
       </p:grpSpPr>
-      <p:sp>
+      <p:sp xmlns:a="http://schemas.openxmlformats.org/drawingml/2006/main" xmlns:r="http://schemas.openxmlformats.org/officeDocument/2006/relationships" xmlns:p="http://schemas.openxmlformats.org/presentationml/2006/main">
         <p:nvSpPr>
           <p:cNvPr id="2" name="Title 1"/>
           <p:cNvSpPr>
@@ -2201,7 +2653,7 @@
           </a:p>
         </p:txBody>
       </p:sp>
-      <p:sp>
+      <p:sp xmlns:a="http://schemas.openxmlformats.org/drawingml/2006/main" xmlns:r="http://schemas.openxmlformats.org/officeDocument/2006/relationships" xmlns:p="http://schemas.openxmlformats.org/presentationml/2006/main">
         <p:nvSpPr>
           <p:cNvPr id="3" name="Text Placeholder 4"/>
           <p:cNvSpPr>
@@ -2223,12 +2675,12 @@
           <a:p>
             <a:r>
               <a:rPr/>
-              <a:t>Differential FDR&lt;0.25</a:t>
-            </a:r>
-          </a:p>
-        </p:txBody>
-      </p:sp>
-      <p:sp>
+              <a:t>Normalized PCA</a:t>
+            </a:r>
+          </a:p>
+        </p:txBody>
+      </p:sp>
+      <p:sp xmlns:a="http://schemas.openxmlformats.org/drawingml/2006/main" xmlns:r="http://schemas.openxmlformats.org/officeDocument/2006/relationships" xmlns:p="http://schemas.openxmlformats.org/presentationml/2006/main">
         <p:nvSpPr>
           <p:cNvPr id="4" name="Text Placeholder 2"/>
           <p:cNvSpPr>
@@ -2250,12 +2702,12 @@
           <a:p>
             <a:r>
               <a:rPr/>
-              <a:t>Complete Set FDR=1</a:t>
-            </a:r>
-          </a:p>
-        </p:txBody>
-      </p:sp>
-      <p:pic>
+              <a:t>Raw PCA</a:t>
+            </a:r>
+          </a:p>
+        </p:txBody>
+      </p:sp>
+      <p:pic xmlns:a="http://schemas.openxmlformats.org/drawingml/2006/main" xmlns:r="http://schemas.openxmlformats.org/officeDocument/2006/relationships" xmlns:p="http://schemas.openxmlformats.org/presentationml/2006/main">
         <p:nvPicPr>
           <p:cNvPr id="5" name="" descr=""/>
           <p:cNvPicPr>
@@ -2274,14 +2726,14 @@
         <p:spPr>
           <a:xfrm>
             <a:off x="4645152" y="1426464"/>
-            <a:ext cx="4114800" cy="5440680"/>
+            <a:ext cx="4114800" cy="3886200"/>
           </a:xfrm>
           <a:prstGeom prst="rect">
             <a:avLst/>
           </a:prstGeom>
         </p:spPr>
       </p:pic>
-      <p:pic>
+      <p:pic xmlns:a="http://schemas.openxmlformats.org/drawingml/2006/main" xmlns:r="http://schemas.openxmlformats.org/officeDocument/2006/relationships" xmlns:p="http://schemas.openxmlformats.org/presentationml/2006/main">
         <p:nvPicPr>
           <p:cNvPr id="6" name="" descr=""/>
           <p:cNvPicPr>
@@ -2300,7 +2752,7 @@
         <p:spPr>
           <a:xfrm>
             <a:off x="457200" y="1426464"/>
-            <a:ext cx="4114800" cy="5440680"/>
+            <a:ext cx="4114800" cy="3886200"/>
           </a:xfrm>
           <a:prstGeom prst="rect">
             <a:avLst/>
@@ -2332,7 +2784,7 @@
           <a:chExt cx="0" cy="0"/>
         </a:xfrm>
       </p:grpSpPr>
-      <p:sp>
+      <p:sp xmlns:a="http://schemas.openxmlformats.org/drawingml/2006/main" xmlns:r="http://schemas.openxmlformats.org/officeDocument/2006/relationships" xmlns:p="http://schemas.openxmlformats.org/presentationml/2006/main">
         <p:nvSpPr>
           <p:cNvPr id="2" name="Title 1"/>
           <p:cNvSpPr>
@@ -2359,7 +2811,7 @@
           </a:p>
         </p:txBody>
       </p:sp>
-      <p:sp>
+      <p:sp xmlns:a="http://schemas.openxmlformats.org/drawingml/2006/main" xmlns:r="http://schemas.openxmlformats.org/officeDocument/2006/relationships" xmlns:p="http://schemas.openxmlformats.org/presentationml/2006/main">
         <p:nvSpPr>
           <p:cNvPr id="3" name="Text Placeholder 4"/>
           <p:cNvSpPr>
@@ -2381,12 +2833,12 @@
           <a:p>
             <a:r>
               <a:rPr/>
-              <a:t>Differential FDR&lt;0.25</a:t>
-            </a:r>
-          </a:p>
-        </p:txBody>
-      </p:sp>
-      <p:sp>
+              <a:t>Normalized PCA</a:t>
+            </a:r>
+          </a:p>
+        </p:txBody>
+      </p:sp>
+      <p:sp xmlns:a="http://schemas.openxmlformats.org/drawingml/2006/main" xmlns:r="http://schemas.openxmlformats.org/officeDocument/2006/relationships" xmlns:p="http://schemas.openxmlformats.org/presentationml/2006/main">
         <p:nvSpPr>
           <p:cNvPr id="4" name="Text Placeholder 2"/>
           <p:cNvSpPr>
@@ -2408,12 +2860,12 @@
           <a:p>
             <a:r>
               <a:rPr/>
-              <a:t>Complete Set FDR=1</a:t>
-            </a:r>
-          </a:p>
-        </p:txBody>
-      </p:sp>
-      <p:pic>
+              <a:t>Raw PCA</a:t>
+            </a:r>
+          </a:p>
+        </p:txBody>
+      </p:sp>
+      <p:pic xmlns:a="http://schemas.openxmlformats.org/drawingml/2006/main" xmlns:r="http://schemas.openxmlformats.org/officeDocument/2006/relationships" xmlns:p="http://schemas.openxmlformats.org/presentationml/2006/main">
         <p:nvPicPr>
           <p:cNvPr id="5" name="" descr=""/>
           <p:cNvPicPr>
@@ -2432,14 +2884,14 @@
         <p:spPr>
           <a:xfrm>
             <a:off x="4645152" y="1426464"/>
-            <a:ext cx="4114800" cy="5440680"/>
+            <a:ext cx="4114800" cy="3886200"/>
           </a:xfrm>
           <a:prstGeom prst="rect">
             <a:avLst/>
           </a:prstGeom>
         </p:spPr>
       </p:pic>
-      <p:pic>
+      <p:pic xmlns:a="http://schemas.openxmlformats.org/drawingml/2006/main" xmlns:r="http://schemas.openxmlformats.org/officeDocument/2006/relationships" xmlns:p="http://schemas.openxmlformats.org/presentationml/2006/main">
         <p:nvPicPr>
           <p:cNvPr id="6" name="" descr=""/>
           <p:cNvPicPr>
@@ -2458,7 +2910,7 @@
         <p:spPr>
           <a:xfrm>
             <a:off x="457200" y="1426464"/>
-            <a:ext cx="4114800" cy="5440680"/>
+            <a:ext cx="4114800" cy="3886200"/>
           </a:xfrm>
           <a:prstGeom prst="rect">
             <a:avLst/>
@@ -2490,7 +2942,7 @@
           <a:chExt cx="0" cy="0"/>
         </a:xfrm>
       </p:grpSpPr>
-      <p:sp>
+      <p:sp xmlns:a="http://schemas.openxmlformats.org/drawingml/2006/main" xmlns:r="http://schemas.openxmlformats.org/officeDocument/2006/relationships" xmlns:p="http://schemas.openxmlformats.org/presentationml/2006/main">
         <p:nvSpPr>
           <p:cNvPr id="2" name="Title 1"/>
           <p:cNvSpPr>
@@ -2517,7 +2969,7 @@
           </a:p>
         </p:txBody>
       </p:sp>
-      <p:sp>
+      <p:sp xmlns:a="http://schemas.openxmlformats.org/drawingml/2006/main" xmlns:r="http://schemas.openxmlformats.org/officeDocument/2006/relationships" xmlns:p="http://schemas.openxmlformats.org/presentationml/2006/main">
         <p:nvSpPr>
           <p:cNvPr id="3" name="Text Placeholder 4"/>
           <p:cNvSpPr>
@@ -2539,12 +2991,12 @@
           <a:p>
             <a:r>
               <a:rPr/>
-              <a:t>Differential FDR&lt;0.25</a:t>
-            </a:r>
-          </a:p>
-        </p:txBody>
-      </p:sp>
-      <p:sp>
+              <a:t>Normalized PCA</a:t>
+            </a:r>
+          </a:p>
+        </p:txBody>
+      </p:sp>
+      <p:sp xmlns:a="http://schemas.openxmlformats.org/drawingml/2006/main" xmlns:r="http://schemas.openxmlformats.org/officeDocument/2006/relationships" xmlns:p="http://schemas.openxmlformats.org/presentationml/2006/main">
         <p:nvSpPr>
           <p:cNvPr id="4" name="Text Placeholder 2"/>
           <p:cNvSpPr>
@@ -2566,12 +3018,12 @@
           <a:p>
             <a:r>
               <a:rPr/>
-              <a:t>Complete Set FDR=1</a:t>
-            </a:r>
-          </a:p>
-        </p:txBody>
-      </p:sp>
-      <p:pic>
+              <a:t>Raw PCA</a:t>
+            </a:r>
+          </a:p>
+        </p:txBody>
+      </p:sp>
+      <p:pic xmlns:a="http://schemas.openxmlformats.org/drawingml/2006/main" xmlns:r="http://schemas.openxmlformats.org/officeDocument/2006/relationships" xmlns:p="http://schemas.openxmlformats.org/presentationml/2006/main">
         <p:nvPicPr>
           <p:cNvPr id="5" name="" descr=""/>
           <p:cNvPicPr>
@@ -2589,8 +3041,34 @@
         </p:blipFill>
         <p:spPr>
           <a:xfrm>
+            <a:off x="4645152" y="1426464"/>
+            <a:ext cx="4114800" cy="3886200"/>
+          </a:xfrm>
+          <a:prstGeom prst="rect">
+            <a:avLst/>
+          </a:prstGeom>
+        </p:spPr>
+      </p:pic>
+      <p:pic xmlns:a="http://schemas.openxmlformats.org/drawingml/2006/main" xmlns:r="http://schemas.openxmlformats.org/officeDocument/2006/relationships" xmlns:p="http://schemas.openxmlformats.org/presentationml/2006/main">
+        <p:nvPicPr>
+          <p:cNvPr id="6" name="" descr=""/>
+          <p:cNvPicPr>
+            <a:picLocks noGrp="1"/>
+          </p:cNvPicPr>
+          <p:nvPr>
+            <p:ph/>
+          </p:nvPr>
+        </p:nvPicPr>
+        <p:blipFill>
+          <a:blip cstate="print" r:embed="rId3"/>
+          <a:stretch>
+            <a:fillRect/>
+          </a:stretch>
+        </p:blipFill>
+        <p:spPr>
+          <a:xfrm>
             <a:off x="457200" y="1426464"/>
-            <a:ext cx="4114800" cy="5440680"/>
+            <a:ext cx="4114800" cy="3886200"/>
           </a:xfrm>
           <a:prstGeom prst="rect">
             <a:avLst/>
@@ -2622,7 +3100,7 @@
           <a:chExt cx="0" cy="0"/>
         </a:xfrm>
       </p:grpSpPr>
-      <p:sp>
+      <p:sp xmlns:a="http://schemas.openxmlformats.org/drawingml/2006/main" xmlns:r="http://schemas.openxmlformats.org/officeDocument/2006/relationships" xmlns:p="http://schemas.openxmlformats.org/presentationml/2006/main">
         <p:nvSpPr>
           <p:cNvPr id="2" name="Title 1"/>
           <p:cNvSpPr>
@@ -2649,7 +3127,7 @@
           </a:p>
         </p:txBody>
       </p:sp>
-      <p:sp>
+      <p:sp xmlns:a="http://schemas.openxmlformats.org/drawingml/2006/main" xmlns:r="http://schemas.openxmlformats.org/officeDocument/2006/relationships" xmlns:p="http://schemas.openxmlformats.org/presentationml/2006/main">
         <p:nvSpPr>
           <p:cNvPr id="3" name="Text Placeholder 4"/>
           <p:cNvSpPr>
@@ -2671,12 +3149,12 @@
           <a:p>
             <a:r>
               <a:rPr/>
-              <a:t>Differential FDR&lt;0.25</a:t>
-            </a:r>
-          </a:p>
-        </p:txBody>
-      </p:sp>
-      <p:sp>
+              <a:t>Normalized PCA</a:t>
+            </a:r>
+          </a:p>
+        </p:txBody>
+      </p:sp>
+      <p:sp xmlns:a="http://schemas.openxmlformats.org/drawingml/2006/main" xmlns:r="http://schemas.openxmlformats.org/officeDocument/2006/relationships" xmlns:p="http://schemas.openxmlformats.org/presentationml/2006/main">
         <p:nvSpPr>
           <p:cNvPr id="4" name="Text Placeholder 2"/>
           <p:cNvSpPr>
@@ -2698,12 +3176,12 @@
           <a:p>
             <a:r>
               <a:rPr/>
-              <a:t>Complete Set FDR=1</a:t>
-            </a:r>
-          </a:p>
-        </p:txBody>
-      </p:sp>
-      <p:pic>
+              <a:t>Raw PCA</a:t>
+            </a:r>
+          </a:p>
+        </p:txBody>
+      </p:sp>
+      <p:pic xmlns:a="http://schemas.openxmlformats.org/drawingml/2006/main" xmlns:r="http://schemas.openxmlformats.org/officeDocument/2006/relationships" xmlns:p="http://schemas.openxmlformats.org/presentationml/2006/main">
         <p:nvPicPr>
           <p:cNvPr id="5" name="" descr=""/>
           <p:cNvPicPr>
@@ -2722,14 +3200,172 @@
         <p:spPr>
           <a:xfrm>
             <a:off x="4645152" y="1426464"/>
-            <a:ext cx="4114800" cy="5440680"/>
+            <a:ext cx="4114800" cy="3886200"/>
           </a:xfrm>
           <a:prstGeom prst="rect">
             <a:avLst/>
           </a:prstGeom>
         </p:spPr>
       </p:pic>
-      <p:pic>
+      <p:pic xmlns:a="http://schemas.openxmlformats.org/drawingml/2006/main" xmlns:r="http://schemas.openxmlformats.org/officeDocument/2006/relationships" xmlns:p="http://schemas.openxmlformats.org/presentationml/2006/main">
+        <p:nvPicPr>
+          <p:cNvPr id="6" name="" descr=""/>
+          <p:cNvPicPr>
+            <a:picLocks noGrp="1"/>
+          </p:cNvPicPr>
+          <p:nvPr>
+            <p:ph/>
+          </p:nvPr>
+        </p:nvPicPr>
+        <p:blipFill>
+          <a:blip cstate="print" r:embed="rId3"/>
+          <a:stretch>
+            <a:fillRect/>
+          </a:stretch>
+        </p:blipFill>
+        <p:spPr>
+          <a:xfrm>
+            <a:off x="457200" y="1426464"/>
+            <a:ext cx="4114800" cy="3886200"/>
+          </a:xfrm>
+          <a:prstGeom prst="rect">
+            <a:avLst/>
+          </a:prstGeom>
+        </p:spPr>
+      </p:pic>
+    </p:spTree>
+  </p:cSld>
+  <p:clrMapOvr>
+    <a:masterClrMapping/>
+  </p:clrMapOvr>
+</p:sld>
+</file>
+
+<file path=ppt/slides/slide9.xml><?xml version="1.0" encoding="utf-8"?>
+<p:sld xmlns:a="http://schemas.openxmlformats.org/drawingml/2006/main" xmlns:r="http://schemas.openxmlformats.org/officeDocument/2006/relationships" xmlns:p="http://schemas.openxmlformats.org/presentationml/2006/main">
+  <p:cSld>
+    <p:spTree>
+      <p:nvGrpSpPr>
+        <p:cNvPr id="1" name=""/>
+        <p:cNvGrpSpPr/>
+        <p:nvPr/>
+      </p:nvGrpSpPr>
+      <p:grpSpPr>
+        <a:xfrm>
+          <a:off x="0" y="0"/>
+          <a:ext cx="0" cy="0"/>
+          <a:chOff x="0" y="0"/>
+          <a:chExt cx="0" cy="0"/>
+        </a:xfrm>
+      </p:grpSpPr>
+      <p:sp xmlns:a="http://schemas.openxmlformats.org/drawingml/2006/main" xmlns:r="http://schemas.openxmlformats.org/officeDocument/2006/relationships" xmlns:p="http://schemas.openxmlformats.org/presentationml/2006/main">
+        <p:nvSpPr>
+          <p:cNvPr id="2" name="Title 1"/>
+          <p:cNvSpPr>
+            <a:spLocks noGrp="1"/>
+          </p:cNvSpPr>
+          <p:nvPr>
+            <p:ph type="title"/>
+          </p:nvPr>
+        </p:nvSpPr>
+        <p:spPr>
+          <a:xfrm>
+            <a:off x="457200" y="6283"/>
+            <a:ext cx="8229600" cy="659640"/>
+          </a:xfrm>
+        </p:spPr>
+        <p:txBody>
+          <a:bodyPr/>
+          <a:lstStyle/>
+          <a:p>
+            <a:r>
+              <a:rPr/>
+              <a:t>Comparison HFDDam_over_RDDam</a:t>
+            </a:r>
+          </a:p>
+        </p:txBody>
+      </p:sp>
+      <p:sp xmlns:a="http://schemas.openxmlformats.org/drawingml/2006/main" xmlns:r="http://schemas.openxmlformats.org/officeDocument/2006/relationships" xmlns:p="http://schemas.openxmlformats.org/presentationml/2006/main">
+        <p:nvSpPr>
+          <p:cNvPr id="3" name="Text Placeholder 4"/>
+          <p:cNvSpPr>
+            <a:spLocks noGrp="1"/>
+          </p:cNvSpPr>
+          <p:nvPr>
+            <p:ph type="body" sz="quarter" idx="3"/>
+          </p:nvPr>
+        </p:nvSpPr>
+        <p:spPr>
+          <a:xfrm>
+            <a:off x="4645025" y="782905"/>
+            <a:ext cx="4041775" cy="639762"/>
+          </a:xfrm>
+        </p:spPr>
+        <p:txBody>
+          <a:bodyPr/>
+          <a:lstStyle/>
+          <a:p>
+            <a:r>
+              <a:rPr/>
+              <a:t>Differential FDR&lt;0.25</a:t>
+            </a:r>
+          </a:p>
+        </p:txBody>
+      </p:sp>
+      <p:sp xmlns:a="http://schemas.openxmlformats.org/drawingml/2006/main" xmlns:r="http://schemas.openxmlformats.org/officeDocument/2006/relationships" xmlns:p="http://schemas.openxmlformats.org/presentationml/2006/main">
+        <p:nvSpPr>
+          <p:cNvPr id="4" name="Text Placeholder 2"/>
+          <p:cNvSpPr>
+            <a:spLocks noGrp="1"/>
+          </p:cNvSpPr>
+          <p:nvPr>
+            <p:ph type="body" idx="1"/>
+          </p:nvPr>
+        </p:nvSpPr>
+        <p:spPr>
+          <a:xfrm>
+            <a:off x="457200" y="776118"/>
+            <a:ext cx="4040188" cy="639762"/>
+          </a:xfrm>
+        </p:spPr>
+        <p:txBody>
+          <a:bodyPr/>
+          <a:lstStyle/>
+          <a:p>
+            <a:r>
+              <a:rPr/>
+              <a:t>Complete Set FDR=1</a:t>
+            </a:r>
+          </a:p>
+        </p:txBody>
+      </p:sp>
+      <p:pic xmlns:a="http://schemas.openxmlformats.org/drawingml/2006/main" xmlns:r="http://schemas.openxmlformats.org/officeDocument/2006/relationships" xmlns:p="http://schemas.openxmlformats.org/presentationml/2006/main">
+        <p:nvPicPr>
+          <p:cNvPr id="5" name="" descr=""/>
+          <p:cNvPicPr>
+            <a:picLocks noGrp="1"/>
+          </p:cNvPicPr>
+          <p:nvPr>
+            <p:ph/>
+          </p:nvPr>
+        </p:nvPicPr>
+        <p:blipFill>
+          <a:blip cstate="print" r:embed="rId2"/>
+          <a:stretch>
+            <a:fillRect/>
+          </a:stretch>
+        </p:blipFill>
+        <p:spPr>
+          <a:xfrm>
+            <a:off x="4645152" y="1426464"/>
+            <a:ext cx="4114800" cy="5440680"/>
+          </a:xfrm>
+          <a:prstGeom prst="rect">
+            <a:avLst/>
+          </a:prstGeom>
+        </p:spPr>
+      </p:pic>
+      <p:pic xmlns:a="http://schemas.openxmlformats.org/drawingml/2006/main" xmlns:r="http://schemas.openxmlformats.org/officeDocument/2006/relationships" xmlns:p="http://schemas.openxmlformats.org/presentationml/2006/main">
         <p:nvPicPr>
           <p:cNvPr id="6" name="" descr=""/>
           <p:cNvPicPr>

--- a/example4-prenormalized-nodummy/results/report.pptx
+++ b/example4-prenormalized-nodummy/results/report.pptx
@@ -10,7 +10,7 @@
   <p:handoutMasterIdLst>
     <p:handoutMasterId r:id="rId3"/>
   </p:handoutMasterIdLst>
-  <p:sldIdLst xmlns:a="http://schemas.openxmlformats.org/drawingml/2006/main" xmlns:r="http://schemas.openxmlformats.org/officeDocument/2006/relationships" xmlns:p="http://schemas.openxmlformats.org/presentationml/2006/main">
+  <p:sldIdLst>
     <p:sldId id="256" r:id="rId8"/>
     <p:sldId id="257" r:id="rId9"/>
     <p:sldId id="258" r:id="rId10"/>
@@ -1793,7 +1793,7 @@
           <a:chExt cx="0" cy="0"/>
         </a:xfrm>
       </p:grpSpPr>
-      <p:sp xmlns:a="http://schemas.openxmlformats.org/drawingml/2006/main" xmlns:r="http://schemas.openxmlformats.org/officeDocument/2006/relationships" xmlns:p="http://schemas.openxmlformats.org/presentationml/2006/main">
+      <p:sp>
         <p:nvSpPr>
           <p:cNvPr id="2" name="Title 1"/>
           <p:cNvSpPr>
@@ -1820,7 +1820,7 @@
           </a:p>
         </p:txBody>
       </p:sp>
-      <p:sp xmlns:a="http://schemas.openxmlformats.org/drawingml/2006/main" xmlns:r="http://schemas.openxmlformats.org/officeDocument/2006/relationships" xmlns:p="http://schemas.openxmlformats.org/presentationml/2006/main">
+      <p:sp>
         <p:nvSpPr>
           <p:cNvPr id="3" name="Subtitle 2"/>
           <p:cNvSpPr>
@@ -1872,7 +1872,7 @@
           <a:chExt cx="0" cy="0"/>
         </a:xfrm>
       </p:grpSpPr>
-      <p:sp xmlns:a="http://schemas.openxmlformats.org/drawingml/2006/main" xmlns:r="http://schemas.openxmlformats.org/officeDocument/2006/relationships" xmlns:p="http://schemas.openxmlformats.org/presentationml/2006/main">
+      <p:sp>
         <p:nvSpPr>
           <p:cNvPr id="2" name="Title 1"/>
           <p:cNvSpPr>
@@ -1899,7 +1899,7 @@
           </a:p>
         </p:txBody>
       </p:sp>
-      <p:sp xmlns:a="http://schemas.openxmlformats.org/drawingml/2006/main" xmlns:r="http://schemas.openxmlformats.org/officeDocument/2006/relationships" xmlns:p="http://schemas.openxmlformats.org/presentationml/2006/main">
+      <p:sp>
         <p:nvSpPr>
           <p:cNvPr id="3" name="Text Placeholder 4"/>
           <p:cNvSpPr>
@@ -1921,12 +1921,12 @@
           <a:p>
             <a:r>
               <a:rPr/>
-              <a:t>Differential FDR&lt;0.25</a:t>
-            </a:r>
-          </a:p>
-        </p:txBody>
-      </p:sp>
-      <p:sp xmlns:a="http://schemas.openxmlformats.org/drawingml/2006/main" xmlns:r="http://schemas.openxmlformats.org/officeDocument/2006/relationships" xmlns:p="http://schemas.openxmlformats.org/presentationml/2006/main">
+              <a:t>Differential fdr&lt;0.25</a:t>
+            </a:r>
+          </a:p>
+        </p:txBody>
+      </p:sp>
+      <p:sp>
         <p:nvSpPr>
           <p:cNvPr id="4" name="Text Placeholder 2"/>
           <p:cNvSpPr>
@@ -1948,12 +1948,12 @@
           <a:p>
             <a:r>
               <a:rPr/>
-              <a:t>Complete Set FDR=1</a:t>
-            </a:r>
-          </a:p>
-        </p:txBody>
-      </p:sp>
-      <p:pic xmlns:a="http://schemas.openxmlformats.org/drawingml/2006/main" xmlns:r="http://schemas.openxmlformats.org/officeDocument/2006/relationships" xmlns:p="http://schemas.openxmlformats.org/presentationml/2006/main">
+              <a:t>Complete Set fdr=1</a:t>
+            </a:r>
+          </a:p>
+        </p:txBody>
+      </p:sp>
+      <p:pic>
         <p:nvPicPr>
           <p:cNvPr id="5" name="" descr=""/>
           <p:cNvPicPr>
@@ -1979,7 +1979,7 @@
           </a:prstGeom>
         </p:spPr>
       </p:pic>
-      <p:pic xmlns:a="http://schemas.openxmlformats.org/drawingml/2006/main" xmlns:r="http://schemas.openxmlformats.org/officeDocument/2006/relationships" xmlns:p="http://schemas.openxmlformats.org/presentationml/2006/main">
+      <p:pic>
         <p:nvPicPr>
           <p:cNvPr id="6" name="" descr=""/>
           <p:cNvPicPr>
@@ -2030,7 +2030,7 @@
           <a:chExt cx="0" cy="0"/>
         </a:xfrm>
       </p:grpSpPr>
-      <p:sp xmlns:a="http://schemas.openxmlformats.org/drawingml/2006/main" xmlns:r="http://schemas.openxmlformats.org/officeDocument/2006/relationships" xmlns:p="http://schemas.openxmlformats.org/presentationml/2006/main">
+      <p:sp>
         <p:nvSpPr>
           <p:cNvPr id="2" name="Title 1"/>
           <p:cNvSpPr>
@@ -2057,7 +2057,7 @@
           </a:p>
         </p:txBody>
       </p:sp>
-      <p:sp xmlns:a="http://schemas.openxmlformats.org/drawingml/2006/main" xmlns:r="http://schemas.openxmlformats.org/officeDocument/2006/relationships" xmlns:p="http://schemas.openxmlformats.org/presentationml/2006/main">
+      <p:sp>
         <p:nvSpPr>
           <p:cNvPr id="3" name="Text Placeholder 4"/>
           <p:cNvSpPr>
@@ -2079,12 +2079,12 @@
           <a:p>
             <a:r>
               <a:rPr/>
-              <a:t>Differential FDR&lt;0.25</a:t>
-            </a:r>
-          </a:p>
-        </p:txBody>
-      </p:sp>
-      <p:sp xmlns:a="http://schemas.openxmlformats.org/drawingml/2006/main" xmlns:r="http://schemas.openxmlformats.org/officeDocument/2006/relationships" xmlns:p="http://schemas.openxmlformats.org/presentationml/2006/main">
+              <a:t>Differential fdr&lt;0.25</a:t>
+            </a:r>
+          </a:p>
+        </p:txBody>
+      </p:sp>
+      <p:sp>
         <p:nvSpPr>
           <p:cNvPr id="4" name="Text Placeholder 2"/>
           <p:cNvSpPr>
@@ -2106,12 +2106,12 @@
           <a:p>
             <a:r>
               <a:rPr/>
-              <a:t>Complete Set FDR=1</a:t>
-            </a:r>
-          </a:p>
-        </p:txBody>
-      </p:sp>
-      <p:pic xmlns:a="http://schemas.openxmlformats.org/drawingml/2006/main" xmlns:r="http://schemas.openxmlformats.org/officeDocument/2006/relationships" xmlns:p="http://schemas.openxmlformats.org/presentationml/2006/main">
+              <a:t>Complete Set fdr=1</a:t>
+            </a:r>
+          </a:p>
+        </p:txBody>
+      </p:sp>
+      <p:pic>
         <p:nvPicPr>
           <p:cNvPr id="5" name="" descr=""/>
           <p:cNvPicPr>
@@ -2162,7 +2162,7 @@
           <a:chExt cx="0" cy="0"/>
         </a:xfrm>
       </p:grpSpPr>
-      <p:sp xmlns:a="http://schemas.openxmlformats.org/drawingml/2006/main" xmlns:r="http://schemas.openxmlformats.org/officeDocument/2006/relationships" xmlns:p="http://schemas.openxmlformats.org/presentationml/2006/main">
+      <p:sp>
         <p:nvSpPr>
           <p:cNvPr id="2" name="Title 1"/>
           <p:cNvSpPr>
@@ -2189,7 +2189,7 @@
           </a:p>
         </p:txBody>
       </p:sp>
-      <p:sp xmlns:a="http://schemas.openxmlformats.org/drawingml/2006/main" xmlns:r="http://schemas.openxmlformats.org/officeDocument/2006/relationships" xmlns:p="http://schemas.openxmlformats.org/presentationml/2006/main">
+      <p:sp>
         <p:nvSpPr>
           <p:cNvPr id="3" name="Text Placeholder 4"/>
           <p:cNvSpPr>
@@ -2211,12 +2211,12 @@
           <a:p>
             <a:r>
               <a:rPr/>
-              <a:t>Differential FDR&lt;0.25</a:t>
-            </a:r>
-          </a:p>
-        </p:txBody>
-      </p:sp>
-      <p:sp xmlns:a="http://schemas.openxmlformats.org/drawingml/2006/main" xmlns:r="http://schemas.openxmlformats.org/officeDocument/2006/relationships" xmlns:p="http://schemas.openxmlformats.org/presentationml/2006/main">
+              <a:t>Differential fdr&lt;0.25</a:t>
+            </a:r>
+          </a:p>
+        </p:txBody>
+      </p:sp>
+      <p:sp>
         <p:nvSpPr>
           <p:cNvPr id="4" name="Text Placeholder 2"/>
           <p:cNvSpPr>
@@ -2238,12 +2238,12 @@
           <a:p>
             <a:r>
               <a:rPr/>
-              <a:t>Complete Set FDR=1</a:t>
-            </a:r>
-          </a:p>
-        </p:txBody>
-      </p:sp>
-      <p:pic xmlns:a="http://schemas.openxmlformats.org/drawingml/2006/main" xmlns:r="http://schemas.openxmlformats.org/officeDocument/2006/relationships" xmlns:p="http://schemas.openxmlformats.org/presentationml/2006/main">
+              <a:t>Complete Set fdr=1</a:t>
+            </a:r>
+          </a:p>
+        </p:txBody>
+      </p:sp>
+      <p:pic>
         <p:nvPicPr>
           <p:cNvPr id="5" name="" descr=""/>
           <p:cNvPicPr>
@@ -2269,7 +2269,7 @@
           </a:prstGeom>
         </p:spPr>
       </p:pic>
-      <p:pic xmlns:a="http://schemas.openxmlformats.org/drawingml/2006/main" xmlns:r="http://schemas.openxmlformats.org/officeDocument/2006/relationships" xmlns:p="http://schemas.openxmlformats.org/presentationml/2006/main">
+      <p:pic>
         <p:nvPicPr>
           <p:cNvPr id="6" name="" descr=""/>
           <p:cNvPicPr>
@@ -2280,7 +2280,7 @@
           </p:nvPr>
         </p:nvPicPr>
         <p:blipFill>
-          <a:blip cstate="print" r:embed="rId3"/>
+          <a:blip cstate="print" r:embed="rId2"/>
           <a:stretch>
             <a:fillRect/>
           </a:stretch>
@@ -2320,7 +2320,7 @@
           <a:chExt cx="0" cy="0"/>
         </a:xfrm>
       </p:grpSpPr>
-      <p:sp xmlns:a="http://schemas.openxmlformats.org/drawingml/2006/main" xmlns:r="http://schemas.openxmlformats.org/officeDocument/2006/relationships" xmlns:p="http://schemas.openxmlformats.org/presentationml/2006/main">
+      <p:sp>
         <p:nvSpPr>
           <p:cNvPr id="2" name="Title 1"/>
           <p:cNvSpPr>
@@ -2347,7 +2347,7 @@
           </a:p>
         </p:txBody>
       </p:sp>
-      <p:sp xmlns:a="http://schemas.openxmlformats.org/drawingml/2006/main" xmlns:r="http://schemas.openxmlformats.org/officeDocument/2006/relationships" xmlns:p="http://schemas.openxmlformats.org/presentationml/2006/main">
+      <p:sp>
         <p:nvSpPr>
           <p:cNvPr id="3" name="Content Placeholder 2"/>
           <p:cNvSpPr>
@@ -2470,7 +2470,7 @@
           <a:chExt cx="0" cy="0"/>
         </a:xfrm>
       </p:grpSpPr>
-      <p:sp xmlns:a="http://schemas.openxmlformats.org/drawingml/2006/main" xmlns:r="http://schemas.openxmlformats.org/officeDocument/2006/relationships" xmlns:p="http://schemas.openxmlformats.org/presentationml/2006/main">
+      <p:sp>
         <p:nvSpPr>
           <p:cNvPr id="2" name="Title 1"/>
           <p:cNvSpPr>
@@ -2497,7 +2497,7 @@
           </a:p>
         </p:txBody>
       </p:sp>
-      <p:pic xmlns:a="http://schemas.openxmlformats.org/drawingml/2006/main" xmlns:r="http://schemas.openxmlformats.org/officeDocument/2006/relationships" xmlns:p="http://schemas.openxmlformats.org/presentationml/2006/main">
+      <p:pic>
         <p:nvPicPr>
           <p:cNvPr id="3" name="" descr=""/>
           <p:cNvPicPr>
@@ -2548,7 +2548,7 @@
           <a:chExt cx="0" cy="0"/>
         </a:xfrm>
       </p:grpSpPr>
-      <p:sp xmlns:a="http://schemas.openxmlformats.org/drawingml/2006/main" xmlns:r="http://schemas.openxmlformats.org/officeDocument/2006/relationships" xmlns:p="http://schemas.openxmlformats.org/presentationml/2006/main">
+      <p:sp>
         <p:nvSpPr>
           <p:cNvPr id="2" name="Title 1"/>
           <p:cNvSpPr>
@@ -2575,7 +2575,7 @@
           </a:p>
         </p:txBody>
       </p:sp>
-      <p:pic xmlns:a="http://schemas.openxmlformats.org/drawingml/2006/main" xmlns:r="http://schemas.openxmlformats.org/officeDocument/2006/relationships" xmlns:p="http://schemas.openxmlformats.org/presentationml/2006/main">
+      <p:pic>
         <p:nvPicPr>
           <p:cNvPr id="3" name="" descr=""/>
           <p:cNvPicPr>
@@ -2626,7 +2626,7 @@
           <a:chExt cx="0" cy="0"/>
         </a:xfrm>
       </p:grpSpPr>
-      <p:sp xmlns:a="http://schemas.openxmlformats.org/drawingml/2006/main" xmlns:r="http://schemas.openxmlformats.org/officeDocument/2006/relationships" xmlns:p="http://schemas.openxmlformats.org/presentationml/2006/main">
+      <p:sp>
         <p:nvSpPr>
           <p:cNvPr id="2" name="Title 1"/>
           <p:cNvSpPr>
@@ -2653,7 +2653,7 @@
           </a:p>
         </p:txBody>
       </p:sp>
-      <p:sp xmlns:a="http://schemas.openxmlformats.org/drawingml/2006/main" xmlns:r="http://schemas.openxmlformats.org/officeDocument/2006/relationships" xmlns:p="http://schemas.openxmlformats.org/presentationml/2006/main">
+      <p:sp>
         <p:nvSpPr>
           <p:cNvPr id="3" name="Text Placeholder 4"/>
           <p:cNvSpPr>
@@ -2680,7 +2680,7 @@
           </a:p>
         </p:txBody>
       </p:sp>
-      <p:sp xmlns:a="http://schemas.openxmlformats.org/drawingml/2006/main" xmlns:r="http://schemas.openxmlformats.org/officeDocument/2006/relationships" xmlns:p="http://schemas.openxmlformats.org/presentationml/2006/main">
+      <p:sp>
         <p:nvSpPr>
           <p:cNvPr id="4" name="Text Placeholder 2"/>
           <p:cNvSpPr>
@@ -2707,7 +2707,7 @@
           </a:p>
         </p:txBody>
       </p:sp>
-      <p:pic xmlns:a="http://schemas.openxmlformats.org/drawingml/2006/main" xmlns:r="http://schemas.openxmlformats.org/officeDocument/2006/relationships" xmlns:p="http://schemas.openxmlformats.org/presentationml/2006/main">
+      <p:pic>
         <p:nvPicPr>
           <p:cNvPr id="5" name="" descr=""/>
           <p:cNvPicPr>
@@ -2733,7 +2733,7 @@
           </a:prstGeom>
         </p:spPr>
       </p:pic>
-      <p:pic xmlns:a="http://schemas.openxmlformats.org/drawingml/2006/main" xmlns:r="http://schemas.openxmlformats.org/officeDocument/2006/relationships" xmlns:p="http://schemas.openxmlformats.org/presentationml/2006/main">
+      <p:pic>
         <p:nvPicPr>
           <p:cNvPr id="6" name="" descr=""/>
           <p:cNvPicPr>
@@ -2744,7 +2744,7 @@
           </p:nvPr>
         </p:nvPicPr>
         <p:blipFill>
-          <a:blip cstate="print" r:embed="rId3"/>
+          <a:blip cstate="print" r:embed="rId2"/>
           <a:stretch>
             <a:fillRect/>
           </a:stretch>
@@ -2784,7 +2784,7 @@
           <a:chExt cx="0" cy="0"/>
         </a:xfrm>
       </p:grpSpPr>
-      <p:sp xmlns:a="http://schemas.openxmlformats.org/drawingml/2006/main" xmlns:r="http://schemas.openxmlformats.org/officeDocument/2006/relationships" xmlns:p="http://schemas.openxmlformats.org/presentationml/2006/main">
+      <p:sp>
         <p:nvSpPr>
           <p:cNvPr id="2" name="Title 1"/>
           <p:cNvSpPr>
@@ -2811,7 +2811,7 @@
           </a:p>
         </p:txBody>
       </p:sp>
-      <p:sp xmlns:a="http://schemas.openxmlformats.org/drawingml/2006/main" xmlns:r="http://schemas.openxmlformats.org/officeDocument/2006/relationships" xmlns:p="http://schemas.openxmlformats.org/presentationml/2006/main">
+      <p:sp>
         <p:nvSpPr>
           <p:cNvPr id="3" name="Text Placeholder 4"/>
           <p:cNvSpPr>
@@ -2838,7 +2838,7 @@
           </a:p>
         </p:txBody>
       </p:sp>
-      <p:sp xmlns:a="http://schemas.openxmlformats.org/drawingml/2006/main" xmlns:r="http://schemas.openxmlformats.org/officeDocument/2006/relationships" xmlns:p="http://schemas.openxmlformats.org/presentationml/2006/main">
+      <p:sp>
         <p:nvSpPr>
           <p:cNvPr id="4" name="Text Placeholder 2"/>
           <p:cNvSpPr>
@@ -2865,7 +2865,7 @@
           </a:p>
         </p:txBody>
       </p:sp>
-      <p:pic xmlns:a="http://schemas.openxmlformats.org/drawingml/2006/main" xmlns:r="http://schemas.openxmlformats.org/officeDocument/2006/relationships" xmlns:p="http://schemas.openxmlformats.org/presentationml/2006/main">
+      <p:pic>
         <p:nvPicPr>
           <p:cNvPr id="5" name="" descr=""/>
           <p:cNvPicPr>
@@ -2891,7 +2891,7 @@
           </a:prstGeom>
         </p:spPr>
       </p:pic>
-      <p:pic xmlns:a="http://schemas.openxmlformats.org/drawingml/2006/main" xmlns:r="http://schemas.openxmlformats.org/officeDocument/2006/relationships" xmlns:p="http://schemas.openxmlformats.org/presentationml/2006/main">
+      <p:pic>
         <p:nvPicPr>
           <p:cNvPr id="6" name="" descr=""/>
           <p:cNvPicPr>
@@ -2902,7 +2902,7 @@
           </p:nvPr>
         </p:nvPicPr>
         <p:blipFill>
-          <a:blip cstate="print" r:embed="rId3"/>
+          <a:blip cstate="print" r:embed="rId2"/>
           <a:stretch>
             <a:fillRect/>
           </a:stretch>
@@ -2942,7 +2942,7 @@
           <a:chExt cx="0" cy="0"/>
         </a:xfrm>
       </p:grpSpPr>
-      <p:sp xmlns:a="http://schemas.openxmlformats.org/drawingml/2006/main" xmlns:r="http://schemas.openxmlformats.org/officeDocument/2006/relationships" xmlns:p="http://schemas.openxmlformats.org/presentationml/2006/main">
+      <p:sp>
         <p:nvSpPr>
           <p:cNvPr id="2" name="Title 1"/>
           <p:cNvSpPr>
@@ -2969,7 +2969,7 @@
           </a:p>
         </p:txBody>
       </p:sp>
-      <p:sp xmlns:a="http://schemas.openxmlformats.org/drawingml/2006/main" xmlns:r="http://schemas.openxmlformats.org/officeDocument/2006/relationships" xmlns:p="http://schemas.openxmlformats.org/presentationml/2006/main">
+      <p:sp>
         <p:nvSpPr>
           <p:cNvPr id="3" name="Text Placeholder 4"/>
           <p:cNvSpPr>
@@ -2996,7 +2996,7 @@
           </a:p>
         </p:txBody>
       </p:sp>
-      <p:sp xmlns:a="http://schemas.openxmlformats.org/drawingml/2006/main" xmlns:r="http://schemas.openxmlformats.org/officeDocument/2006/relationships" xmlns:p="http://schemas.openxmlformats.org/presentationml/2006/main">
+      <p:sp>
         <p:nvSpPr>
           <p:cNvPr id="4" name="Text Placeholder 2"/>
           <p:cNvSpPr>
@@ -3023,7 +3023,7 @@
           </a:p>
         </p:txBody>
       </p:sp>
-      <p:pic xmlns:a="http://schemas.openxmlformats.org/drawingml/2006/main" xmlns:r="http://schemas.openxmlformats.org/officeDocument/2006/relationships" xmlns:p="http://schemas.openxmlformats.org/presentationml/2006/main">
+      <p:pic>
         <p:nvPicPr>
           <p:cNvPr id="5" name="" descr=""/>
           <p:cNvPicPr>
@@ -3049,7 +3049,7 @@
           </a:prstGeom>
         </p:spPr>
       </p:pic>
-      <p:pic xmlns:a="http://schemas.openxmlformats.org/drawingml/2006/main" xmlns:r="http://schemas.openxmlformats.org/officeDocument/2006/relationships" xmlns:p="http://schemas.openxmlformats.org/presentationml/2006/main">
+      <p:pic>
         <p:nvPicPr>
           <p:cNvPr id="6" name="" descr=""/>
           <p:cNvPicPr>
@@ -3060,7 +3060,7 @@
           </p:nvPr>
         </p:nvPicPr>
         <p:blipFill>
-          <a:blip cstate="print" r:embed="rId3"/>
+          <a:blip cstate="print" r:embed="rId2"/>
           <a:stretch>
             <a:fillRect/>
           </a:stretch>
@@ -3100,7 +3100,7 @@
           <a:chExt cx="0" cy="0"/>
         </a:xfrm>
       </p:grpSpPr>
-      <p:sp xmlns:a="http://schemas.openxmlformats.org/drawingml/2006/main" xmlns:r="http://schemas.openxmlformats.org/officeDocument/2006/relationships" xmlns:p="http://schemas.openxmlformats.org/presentationml/2006/main">
+      <p:sp>
         <p:nvSpPr>
           <p:cNvPr id="2" name="Title 1"/>
           <p:cNvSpPr>
@@ -3127,7 +3127,7 @@
           </a:p>
         </p:txBody>
       </p:sp>
-      <p:sp xmlns:a="http://schemas.openxmlformats.org/drawingml/2006/main" xmlns:r="http://schemas.openxmlformats.org/officeDocument/2006/relationships" xmlns:p="http://schemas.openxmlformats.org/presentationml/2006/main">
+      <p:sp>
         <p:nvSpPr>
           <p:cNvPr id="3" name="Text Placeholder 4"/>
           <p:cNvSpPr>
@@ -3154,7 +3154,7 @@
           </a:p>
         </p:txBody>
       </p:sp>
-      <p:sp xmlns:a="http://schemas.openxmlformats.org/drawingml/2006/main" xmlns:r="http://schemas.openxmlformats.org/officeDocument/2006/relationships" xmlns:p="http://schemas.openxmlformats.org/presentationml/2006/main">
+      <p:sp>
         <p:nvSpPr>
           <p:cNvPr id="4" name="Text Placeholder 2"/>
           <p:cNvSpPr>
@@ -3181,7 +3181,7 @@
           </a:p>
         </p:txBody>
       </p:sp>
-      <p:pic xmlns:a="http://schemas.openxmlformats.org/drawingml/2006/main" xmlns:r="http://schemas.openxmlformats.org/officeDocument/2006/relationships" xmlns:p="http://schemas.openxmlformats.org/presentationml/2006/main">
+      <p:pic>
         <p:nvPicPr>
           <p:cNvPr id="5" name="" descr=""/>
           <p:cNvPicPr>
@@ -3207,7 +3207,7 @@
           </a:prstGeom>
         </p:spPr>
       </p:pic>
-      <p:pic xmlns:a="http://schemas.openxmlformats.org/drawingml/2006/main" xmlns:r="http://schemas.openxmlformats.org/officeDocument/2006/relationships" xmlns:p="http://schemas.openxmlformats.org/presentationml/2006/main">
+      <p:pic>
         <p:nvPicPr>
           <p:cNvPr id="6" name="" descr=""/>
           <p:cNvPicPr>
@@ -3218,7 +3218,7 @@
           </p:nvPr>
         </p:nvPicPr>
         <p:blipFill>
-          <a:blip cstate="print" r:embed="rId3"/>
+          <a:blip cstate="print" r:embed="rId2"/>
           <a:stretch>
             <a:fillRect/>
           </a:stretch>
@@ -3258,7 +3258,7 @@
           <a:chExt cx="0" cy="0"/>
         </a:xfrm>
       </p:grpSpPr>
-      <p:sp xmlns:a="http://schemas.openxmlformats.org/drawingml/2006/main" xmlns:r="http://schemas.openxmlformats.org/officeDocument/2006/relationships" xmlns:p="http://schemas.openxmlformats.org/presentationml/2006/main">
+      <p:sp>
         <p:nvSpPr>
           <p:cNvPr id="2" name="Title 1"/>
           <p:cNvSpPr>
@@ -3285,7 +3285,7 @@
           </a:p>
         </p:txBody>
       </p:sp>
-      <p:sp xmlns:a="http://schemas.openxmlformats.org/drawingml/2006/main" xmlns:r="http://schemas.openxmlformats.org/officeDocument/2006/relationships" xmlns:p="http://schemas.openxmlformats.org/presentationml/2006/main">
+      <p:sp>
         <p:nvSpPr>
           <p:cNvPr id="3" name="Text Placeholder 4"/>
           <p:cNvSpPr>
@@ -3307,12 +3307,12 @@
           <a:p>
             <a:r>
               <a:rPr/>
-              <a:t>Differential FDR&lt;0.25</a:t>
-            </a:r>
-          </a:p>
-        </p:txBody>
-      </p:sp>
-      <p:sp xmlns:a="http://schemas.openxmlformats.org/drawingml/2006/main" xmlns:r="http://schemas.openxmlformats.org/officeDocument/2006/relationships" xmlns:p="http://schemas.openxmlformats.org/presentationml/2006/main">
+              <a:t>Differential fdr&lt;0.25</a:t>
+            </a:r>
+          </a:p>
+        </p:txBody>
+      </p:sp>
+      <p:sp>
         <p:nvSpPr>
           <p:cNvPr id="4" name="Text Placeholder 2"/>
           <p:cNvSpPr>
@@ -3334,12 +3334,12 @@
           <a:p>
             <a:r>
               <a:rPr/>
-              <a:t>Complete Set FDR=1</a:t>
-            </a:r>
-          </a:p>
-        </p:txBody>
-      </p:sp>
-      <p:pic xmlns:a="http://schemas.openxmlformats.org/drawingml/2006/main" xmlns:r="http://schemas.openxmlformats.org/officeDocument/2006/relationships" xmlns:p="http://schemas.openxmlformats.org/presentationml/2006/main">
+              <a:t>Complete Set fdr=1</a:t>
+            </a:r>
+          </a:p>
+        </p:txBody>
+      </p:sp>
+      <p:pic>
         <p:nvPicPr>
           <p:cNvPr id="5" name="" descr=""/>
           <p:cNvPicPr>
@@ -3365,7 +3365,7 @@
           </a:prstGeom>
         </p:spPr>
       </p:pic>
-      <p:pic xmlns:a="http://schemas.openxmlformats.org/drawingml/2006/main" xmlns:r="http://schemas.openxmlformats.org/officeDocument/2006/relationships" xmlns:p="http://schemas.openxmlformats.org/presentationml/2006/main">
+      <p:pic>
         <p:nvPicPr>
           <p:cNvPr id="6" name="" descr=""/>
           <p:cNvPicPr>
